--- a/slides/督导系统建设成果汇报.pptx
+++ b/slides/督导系统建设成果汇报.pptx
@@ -8300,7 +8300,7 @@
                 <a:ea typeface="Microsoft YaHei"/>
                 <a:cs typeface="Microsoft YaHei"/>
               </a:rPr>
-              <a:t>前后端分离 · 数据驱动 · 真实课表自动解析建库</a:t>
+              <a:t>前后端分离 · 数据驱动 · 真实课表自动解析建库 · 已部署阿里云上线运行</a:t>
             </a:r>
           </a:p>
         </p:txBody>
@@ -8683,7 +8683,7 @@
                 <a:ea typeface="Microsoft YaHei"/>
                 <a:cs typeface="Microsoft YaHei"/>
               </a:rPr>
-              <a:t>六个维度，系统已具备真实可用能力</a:t>
+              <a:t>系统已上线，六个维度具备真实可用能力</a:t>
             </a:r>
           </a:p>
         </p:txBody>
@@ -8696,8 +8696,102 @@
         </p:nvSpPr>
         <p:spPr>
           <a:xfrm>
-            <a:off x="566928" y="2103120"/>
-            <a:ext cx="5349240" cy="1078992"/>
+            <a:off x="566928" y="1901952"/>
+            <a:ext cx="11064240" cy="603504"/>
+          </a:xfrm>
+          <a:prstGeom prst="roundRect">
+            <a:avLst>
+              <a:gd name="adj" fmla="val 10000"/>
+            </a:avLst>
+          </a:prstGeom>
+          <a:solidFill>
+            <a:srgbClr val="0E9F8E"/>
+          </a:solidFill>
+          <a:ln>
+            <a:noFill/>
+          </a:ln>
+          <a:effectLst/>
+          <a:effectLst>
+            <a:outerShdw blurRad="90000" dist="40000" dir="5400000" rotWithShape="0">
+              <a:srgbClr val="0E2A56">
+                <a:alpha val="16000"/>
+              </a:srgbClr>
+            </a:outerShdw>
+          </a:effectLst>
+        </p:spPr>
+        <p:style>
+          <a:lnRef idx="1">
+            <a:schemeClr val="accent1"/>
+          </a:lnRef>
+          <a:fillRef idx="3">
+            <a:schemeClr val="accent1"/>
+          </a:fillRef>
+          <a:effectRef idx="2">
+            <a:schemeClr val="accent1"/>
+          </a:effectRef>
+          <a:fontRef idx="minor">
+            <a:schemeClr val="lt1"/>
+          </a:fontRef>
+        </p:style>
+        <p:txBody>
+          <a:bodyPr rtlCol="0" anchor="ctr"/>
+          <a:lstStyle/>
+          <a:p>
+            <a:pPr algn="ctr"/>
+          </a:p>
+        </p:txBody>
+      </p:sp>
+      <p:sp>
+        <p:nvSpPr>
+          <p:cNvPr id="9" name="TextBox 8"/>
+          <p:cNvSpPr txBox="1"/>
+          <p:nvPr/>
+        </p:nvSpPr>
+        <p:spPr>
+          <a:xfrm>
+            <a:off x="566928" y="1901952"/>
+            <a:ext cx="11064240" cy="603504"/>
+          </a:xfrm>
+          <a:prstGeom prst="rect">
+            <a:avLst/>
+          </a:prstGeom>
+          <a:noFill/>
+        </p:spPr>
+        <p:txBody>
+          <a:bodyPr wrap="square" anchor="ctr" lIns="0" rIns="0" tIns="0" bIns="0">
+            <a:spAutoFit/>
+          </a:bodyPr>
+          <a:lstStyle/>
+          <a:p>
+            <a:pPr algn="ctr">
+              <a:lnSpc>
+                <a:spcPct val="100000"/>
+              </a:lnSpc>
+            </a:pPr>
+            <a:r>
+              <a:rPr sz="1500" b="1">
+                <a:solidFill>
+                  <a:srgbClr val="FFFFFF"/>
+                </a:solidFill>
+                <a:latin typeface="Microsoft YaHei"/>
+                <a:ea typeface="Microsoft YaHei"/>
+                <a:cs typeface="Microsoft YaHei"/>
+              </a:rPr>
+              <a:t>✅  系统已部署上线运行（阿里云），持续运维迭代 —— 面向真实业务的可用系统，而非演示原型</a:t>
+            </a:r>
+          </a:p>
+        </p:txBody>
+      </p:sp>
+      <p:sp>
+        <p:nvSpPr>
+          <p:cNvPr id="10" name="Rounded Rectangle 9"/>
+          <p:cNvSpPr/>
+          <p:nvPr/>
+        </p:nvSpPr>
+        <p:spPr>
+          <a:xfrm>
+            <a:off x="566928" y="2697480"/>
+            <a:ext cx="5349240" cy="950976"/>
           </a:xfrm>
           <a:prstGeom prst="roundRect">
             <a:avLst>
@@ -8745,14 +8839,14 @@
       </p:sp>
       <p:sp>
         <p:nvSpPr>
-          <p:cNvPr id="9" name="Rounded Rectangle 8"/>
+          <p:cNvPr id="11" name="Rounded Rectangle 10"/>
           <p:cNvSpPr/>
           <p:nvPr/>
         </p:nvSpPr>
         <p:spPr>
           <a:xfrm>
-            <a:off x="795528" y="2377439"/>
-            <a:ext cx="530352" cy="530352"/>
+            <a:off x="795528" y="2916936"/>
+            <a:ext cx="512064" cy="512064"/>
           </a:xfrm>
           <a:prstGeom prst="roundRect">
             <a:avLst>
@@ -8791,14 +8885,14 @@
       </p:sp>
       <p:sp>
         <p:nvSpPr>
-          <p:cNvPr id="10" name="TextBox 9"/>
-          <p:cNvSpPr txBox="1"/>
-          <p:nvPr/>
-        </p:nvSpPr>
-        <p:spPr>
-          <a:xfrm>
-            <a:off x="795528" y="2359152"/>
-            <a:ext cx="530352" cy="530352"/>
+          <p:cNvPr id="12" name="TextBox 11"/>
+          <p:cNvSpPr txBox="1"/>
+          <p:nvPr/>
+        </p:nvSpPr>
+        <p:spPr>
+          <a:xfrm>
+            <a:off x="795528" y="2898648"/>
+            <a:ext cx="512064" cy="512064"/>
           </a:xfrm>
           <a:prstGeom prst="rect">
             <a:avLst/>
@@ -8817,7 +8911,7 @@
               </a:lnSpc>
             </a:pPr>
             <a:r>
-              <a:rPr sz="2000" b="1">
+              <a:rPr sz="1900" b="1">
                 <a:solidFill>
                   <a:srgbClr val="FFFFFF"/>
                 </a:solidFill>
@@ -8832,14 +8926,14 @@
       </p:sp>
       <p:sp>
         <p:nvSpPr>
-          <p:cNvPr id="11" name="TextBox 10"/>
-          <p:cNvSpPr txBox="1"/>
-          <p:nvPr/>
-        </p:nvSpPr>
-        <p:spPr>
-          <a:xfrm>
-            <a:off x="1527048" y="2304288"/>
-            <a:ext cx="4251959" cy="457200"/>
+          <p:cNvPr id="13" name="TextBox 12"/>
+          <p:cNvSpPr txBox="1"/>
+          <p:nvPr/>
+        </p:nvSpPr>
+        <p:spPr>
+          <a:xfrm>
+            <a:off x="1481328" y="2862072"/>
+            <a:ext cx="4297679" cy="457200"/>
           </a:xfrm>
           <a:prstGeom prst="rect">
             <a:avLst/>
@@ -8858,7 +8952,7 @@
               </a:lnSpc>
             </a:pPr>
             <a:r>
-              <a:rPr sz="1700" b="1">
+              <a:rPr sz="1650" b="1">
                 <a:solidFill>
                   <a:srgbClr val="0E2A56"/>
                 </a:solidFill>
@@ -8873,14 +8967,14 @@
       </p:sp>
       <p:sp>
         <p:nvSpPr>
-          <p:cNvPr id="12" name="TextBox 11"/>
-          <p:cNvSpPr txBox="1"/>
-          <p:nvPr/>
-        </p:nvSpPr>
-        <p:spPr>
-          <a:xfrm>
-            <a:off x="1527048" y="2706624"/>
-            <a:ext cx="4251959" cy="411480"/>
+          <p:cNvPr id="14" name="TextBox 13"/>
+          <p:cNvSpPr txBox="1"/>
+          <p:nvPr/>
+        </p:nvSpPr>
+        <p:spPr>
+          <a:xfrm>
+            <a:off x="1481328" y="3246120"/>
+            <a:ext cx="4297679" cy="365760"/>
           </a:xfrm>
           <a:prstGeom prst="rect">
             <a:avLst/>
@@ -8914,14 +9008,14 @@
       </p:sp>
       <p:sp>
         <p:nvSpPr>
-          <p:cNvPr id="13" name="Rounded Rectangle 12"/>
+          <p:cNvPr id="15" name="Rounded Rectangle 14"/>
           <p:cNvSpPr/>
           <p:nvPr/>
         </p:nvSpPr>
         <p:spPr>
           <a:xfrm>
-            <a:off x="6281928" y="2103120"/>
-            <a:ext cx="5349240" cy="1078992"/>
+            <a:off x="6281928" y="2697480"/>
+            <a:ext cx="5349240" cy="950976"/>
           </a:xfrm>
           <a:prstGeom prst="roundRect">
             <a:avLst>
@@ -8969,14 +9063,14 @@
       </p:sp>
       <p:sp>
         <p:nvSpPr>
-          <p:cNvPr id="14" name="Rounded Rectangle 13"/>
+          <p:cNvPr id="16" name="Rounded Rectangle 15"/>
           <p:cNvSpPr/>
           <p:nvPr/>
         </p:nvSpPr>
         <p:spPr>
           <a:xfrm>
-            <a:off x="6510528" y="2377439"/>
-            <a:ext cx="530352" cy="530352"/>
+            <a:off x="6510528" y="2916936"/>
+            <a:ext cx="512064" cy="512064"/>
           </a:xfrm>
           <a:prstGeom prst="roundRect">
             <a:avLst>
@@ -9015,14 +9109,14 @@
       </p:sp>
       <p:sp>
         <p:nvSpPr>
-          <p:cNvPr id="15" name="TextBox 14"/>
-          <p:cNvSpPr txBox="1"/>
-          <p:nvPr/>
-        </p:nvSpPr>
-        <p:spPr>
-          <a:xfrm>
-            <a:off x="6510528" y="2359152"/>
-            <a:ext cx="530352" cy="530352"/>
+          <p:cNvPr id="17" name="TextBox 16"/>
+          <p:cNvSpPr txBox="1"/>
+          <p:nvPr/>
+        </p:nvSpPr>
+        <p:spPr>
+          <a:xfrm>
+            <a:off x="6510528" y="2898648"/>
+            <a:ext cx="512064" cy="512064"/>
           </a:xfrm>
           <a:prstGeom prst="rect">
             <a:avLst/>
@@ -9041,7 +9135,7 @@
               </a:lnSpc>
             </a:pPr>
             <a:r>
-              <a:rPr sz="2000" b="1">
+              <a:rPr sz="1900" b="1">
                 <a:solidFill>
                   <a:srgbClr val="FFFFFF"/>
                 </a:solidFill>
@@ -9056,14 +9150,14 @@
       </p:sp>
       <p:sp>
         <p:nvSpPr>
-          <p:cNvPr id="16" name="TextBox 15"/>
-          <p:cNvSpPr txBox="1"/>
-          <p:nvPr/>
-        </p:nvSpPr>
-        <p:spPr>
-          <a:xfrm>
-            <a:off x="7242048" y="2304288"/>
-            <a:ext cx="4251959" cy="457200"/>
+          <p:cNvPr id="18" name="TextBox 17"/>
+          <p:cNvSpPr txBox="1"/>
+          <p:nvPr/>
+        </p:nvSpPr>
+        <p:spPr>
+          <a:xfrm>
+            <a:off x="7196328" y="2862072"/>
+            <a:ext cx="4297679" cy="457200"/>
           </a:xfrm>
           <a:prstGeom prst="rect">
             <a:avLst/>
@@ -9082,7 +9176,7 @@
               </a:lnSpc>
             </a:pPr>
             <a:r>
-              <a:rPr sz="1700" b="1">
+              <a:rPr sz="1650" b="1">
                 <a:solidFill>
                   <a:srgbClr val="0E2A56"/>
                 </a:solidFill>
@@ -9097,14 +9191,14 @@
       </p:sp>
       <p:sp>
         <p:nvSpPr>
-          <p:cNvPr id="17" name="TextBox 16"/>
-          <p:cNvSpPr txBox="1"/>
-          <p:nvPr/>
-        </p:nvSpPr>
-        <p:spPr>
-          <a:xfrm>
-            <a:off x="7242048" y="2706624"/>
-            <a:ext cx="4251959" cy="411480"/>
+          <p:cNvPr id="19" name="TextBox 18"/>
+          <p:cNvSpPr txBox="1"/>
+          <p:nvPr/>
+        </p:nvSpPr>
+        <p:spPr>
+          <a:xfrm>
+            <a:off x="7196328" y="3246120"/>
+            <a:ext cx="4297679" cy="365760"/>
           </a:xfrm>
           <a:prstGeom prst="rect">
             <a:avLst/>
@@ -9138,14 +9232,14 @@
       </p:sp>
       <p:sp>
         <p:nvSpPr>
-          <p:cNvPr id="18" name="Rounded Rectangle 17"/>
+          <p:cNvPr id="20" name="Rounded Rectangle 19"/>
           <p:cNvSpPr/>
           <p:nvPr/>
         </p:nvSpPr>
         <p:spPr>
           <a:xfrm>
-            <a:off x="566928" y="3383279"/>
-            <a:ext cx="5349240" cy="1078992"/>
+            <a:off x="566928" y="3794760"/>
+            <a:ext cx="5349240" cy="950976"/>
           </a:xfrm>
           <a:prstGeom prst="roundRect">
             <a:avLst>
@@ -9193,14 +9287,14 @@
       </p:sp>
       <p:sp>
         <p:nvSpPr>
-          <p:cNvPr id="19" name="Rounded Rectangle 18"/>
+          <p:cNvPr id="21" name="Rounded Rectangle 20"/>
           <p:cNvSpPr/>
           <p:nvPr/>
         </p:nvSpPr>
         <p:spPr>
           <a:xfrm>
-            <a:off x="795528" y="3657599"/>
-            <a:ext cx="530352" cy="530352"/>
+            <a:off x="795528" y="4014216"/>
+            <a:ext cx="512064" cy="512064"/>
           </a:xfrm>
           <a:prstGeom prst="roundRect">
             <a:avLst>
@@ -9239,14 +9333,14 @@
       </p:sp>
       <p:sp>
         <p:nvSpPr>
-          <p:cNvPr id="20" name="TextBox 19"/>
-          <p:cNvSpPr txBox="1"/>
-          <p:nvPr/>
-        </p:nvSpPr>
-        <p:spPr>
-          <a:xfrm>
-            <a:off x="795528" y="3639311"/>
-            <a:ext cx="530352" cy="530352"/>
+          <p:cNvPr id="22" name="TextBox 21"/>
+          <p:cNvSpPr txBox="1"/>
+          <p:nvPr/>
+        </p:nvSpPr>
+        <p:spPr>
+          <a:xfrm>
+            <a:off x="795528" y="3995928"/>
+            <a:ext cx="512064" cy="512064"/>
           </a:xfrm>
           <a:prstGeom prst="rect">
             <a:avLst/>
@@ -9265,7 +9359,7 @@
               </a:lnSpc>
             </a:pPr>
             <a:r>
-              <a:rPr sz="2000" b="1">
+              <a:rPr sz="1900" b="1">
                 <a:solidFill>
                   <a:srgbClr val="FFFFFF"/>
                 </a:solidFill>
@@ -9280,14 +9374,14 @@
       </p:sp>
       <p:sp>
         <p:nvSpPr>
-          <p:cNvPr id="21" name="TextBox 20"/>
-          <p:cNvSpPr txBox="1"/>
-          <p:nvPr/>
-        </p:nvSpPr>
-        <p:spPr>
-          <a:xfrm>
-            <a:off x="1527048" y="3584448"/>
-            <a:ext cx="4251959" cy="457200"/>
+          <p:cNvPr id="23" name="TextBox 22"/>
+          <p:cNvSpPr txBox="1"/>
+          <p:nvPr/>
+        </p:nvSpPr>
+        <p:spPr>
+          <a:xfrm>
+            <a:off x="1481328" y="3959352"/>
+            <a:ext cx="4297679" cy="457200"/>
           </a:xfrm>
           <a:prstGeom prst="rect">
             <a:avLst/>
@@ -9306,7 +9400,7 @@
               </a:lnSpc>
             </a:pPr>
             <a:r>
-              <a:rPr sz="1700" b="1">
+              <a:rPr sz="1650" b="1">
                 <a:solidFill>
                   <a:srgbClr val="0E2A56"/>
                 </a:solidFill>
@@ -9321,14 +9415,14 @@
       </p:sp>
       <p:sp>
         <p:nvSpPr>
-          <p:cNvPr id="22" name="TextBox 21"/>
-          <p:cNvSpPr txBox="1"/>
-          <p:nvPr/>
-        </p:nvSpPr>
-        <p:spPr>
-          <a:xfrm>
-            <a:off x="1527048" y="3986783"/>
-            <a:ext cx="4251959" cy="411480"/>
+          <p:cNvPr id="24" name="TextBox 23"/>
+          <p:cNvSpPr txBox="1"/>
+          <p:nvPr/>
+        </p:nvSpPr>
+        <p:spPr>
+          <a:xfrm>
+            <a:off x="1481328" y="4343400"/>
+            <a:ext cx="4297679" cy="365760"/>
           </a:xfrm>
           <a:prstGeom prst="rect">
             <a:avLst/>
@@ -9362,14 +9456,14 @@
       </p:sp>
       <p:sp>
         <p:nvSpPr>
-          <p:cNvPr id="23" name="Rounded Rectangle 22"/>
+          <p:cNvPr id="25" name="Rounded Rectangle 24"/>
           <p:cNvSpPr/>
           <p:nvPr/>
         </p:nvSpPr>
         <p:spPr>
           <a:xfrm>
-            <a:off x="6281928" y="3383279"/>
-            <a:ext cx="5349240" cy="1078992"/>
+            <a:off x="6281928" y="3794760"/>
+            <a:ext cx="5349240" cy="950976"/>
           </a:xfrm>
           <a:prstGeom prst="roundRect">
             <a:avLst>
@@ -9417,14 +9511,14 @@
       </p:sp>
       <p:sp>
         <p:nvSpPr>
-          <p:cNvPr id="24" name="Rounded Rectangle 23"/>
+          <p:cNvPr id="26" name="Rounded Rectangle 25"/>
           <p:cNvSpPr/>
           <p:nvPr/>
         </p:nvSpPr>
         <p:spPr>
           <a:xfrm>
-            <a:off x="6510528" y="3657599"/>
-            <a:ext cx="530352" cy="530352"/>
+            <a:off x="6510528" y="4014216"/>
+            <a:ext cx="512064" cy="512064"/>
           </a:xfrm>
           <a:prstGeom prst="roundRect">
             <a:avLst>
@@ -9463,14 +9557,14 @@
       </p:sp>
       <p:sp>
         <p:nvSpPr>
-          <p:cNvPr id="25" name="TextBox 24"/>
-          <p:cNvSpPr txBox="1"/>
-          <p:nvPr/>
-        </p:nvSpPr>
-        <p:spPr>
-          <a:xfrm>
-            <a:off x="6510528" y="3639311"/>
-            <a:ext cx="530352" cy="530352"/>
+          <p:cNvPr id="27" name="TextBox 26"/>
+          <p:cNvSpPr txBox="1"/>
+          <p:nvPr/>
+        </p:nvSpPr>
+        <p:spPr>
+          <a:xfrm>
+            <a:off x="6510528" y="3995928"/>
+            <a:ext cx="512064" cy="512064"/>
           </a:xfrm>
           <a:prstGeom prst="rect">
             <a:avLst/>
@@ -9489,7 +9583,7 @@
               </a:lnSpc>
             </a:pPr>
             <a:r>
-              <a:rPr sz="2000" b="1">
+              <a:rPr sz="1900" b="1">
                 <a:solidFill>
                   <a:srgbClr val="FFFFFF"/>
                 </a:solidFill>
@@ -9504,14 +9598,14 @@
       </p:sp>
       <p:sp>
         <p:nvSpPr>
-          <p:cNvPr id="26" name="TextBox 25"/>
-          <p:cNvSpPr txBox="1"/>
-          <p:nvPr/>
-        </p:nvSpPr>
-        <p:spPr>
-          <a:xfrm>
-            <a:off x="7242048" y="3584448"/>
-            <a:ext cx="4251959" cy="457200"/>
+          <p:cNvPr id="28" name="TextBox 27"/>
+          <p:cNvSpPr txBox="1"/>
+          <p:nvPr/>
+        </p:nvSpPr>
+        <p:spPr>
+          <a:xfrm>
+            <a:off x="7196328" y="3959352"/>
+            <a:ext cx="4297679" cy="457200"/>
           </a:xfrm>
           <a:prstGeom prst="rect">
             <a:avLst/>
@@ -9530,7 +9624,7 @@
               </a:lnSpc>
             </a:pPr>
             <a:r>
-              <a:rPr sz="1700" b="1">
+              <a:rPr sz="1650" b="1">
                 <a:solidFill>
                   <a:srgbClr val="0E2A56"/>
                 </a:solidFill>
@@ -9545,14 +9639,14 @@
       </p:sp>
       <p:sp>
         <p:nvSpPr>
-          <p:cNvPr id="27" name="TextBox 26"/>
-          <p:cNvSpPr txBox="1"/>
-          <p:nvPr/>
-        </p:nvSpPr>
-        <p:spPr>
-          <a:xfrm>
-            <a:off x="7242048" y="3986783"/>
-            <a:ext cx="4251959" cy="411480"/>
+          <p:cNvPr id="29" name="TextBox 28"/>
+          <p:cNvSpPr txBox="1"/>
+          <p:nvPr/>
+        </p:nvSpPr>
+        <p:spPr>
+          <a:xfrm>
+            <a:off x="7196328" y="4343400"/>
+            <a:ext cx="4297679" cy="365760"/>
           </a:xfrm>
           <a:prstGeom prst="rect">
             <a:avLst/>
@@ -9586,14 +9680,14 @@
       </p:sp>
       <p:sp>
         <p:nvSpPr>
-          <p:cNvPr id="28" name="Rounded Rectangle 27"/>
+          <p:cNvPr id="30" name="Rounded Rectangle 29"/>
           <p:cNvSpPr/>
           <p:nvPr/>
         </p:nvSpPr>
         <p:spPr>
           <a:xfrm>
-            <a:off x="566928" y="4663440"/>
-            <a:ext cx="5349240" cy="1078992"/>
+            <a:off x="566928" y="4892040"/>
+            <a:ext cx="5349240" cy="950976"/>
           </a:xfrm>
           <a:prstGeom prst="roundRect">
             <a:avLst>
@@ -9641,14 +9735,14 @@
       </p:sp>
       <p:sp>
         <p:nvSpPr>
-          <p:cNvPr id="29" name="Rounded Rectangle 28"/>
+          <p:cNvPr id="31" name="Rounded Rectangle 30"/>
           <p:cNvSpPr/>
           <p:nvPr/>
         </p:nvSpPr>
         <p:spPr>
           <a:xfrm>
-            <a:off x="795528" y="4937759"/>
-            <a:ext cx="530352" cy="530352"/>
+            <a:off x="795528" y="5111496"/>
+            <a:ext cx="512064" cy="512064"/>
           </a:xfrm>
           <a:prstGeom prst="roundRect">
             <a:avLst>
@@ -9687,14 +9781,14 @@
       </p:sp>
       <p:sp>
         <p:nvSpPr>
-          <p:cNvPr id="30" name="TextBox 29"/>
-          <p:cNvSpPr txBox="1"/>
-          <p:nvPr/>
-        </p:nvSpPr>
-        <p:spPr>
-          <a:xfrm>
-            <a:off x="795528" y="4919472"/>
-            <a:ext cx="530352" cy="530352"/>
+          <p:cNvPr id="32" name="TextBox 31"/>
+          <p:cNvSpPr txBox="1"/>
+          <p:nvPr/>
+        </p:nvSpPr>
+        <p:spPr>
+          <a:xfrm>
+            <a:off x="795528" y="5093207"/>
+            <a:ext cx="512064" cy="512064"/>
           </a:xfrm>
           <a:prstGeom prst="rect">
             <a:avLst/>
@@ -9713,7 +9807,7 @@
               </a:lnSpc>
             </a:pPr>
             <a:r>
-              <a:rPr sz="2000" b="1">
+              <a:rPr sz="1900" b="1">
                 <a:solidFill>
                   <a:srgbClr val="FFFFFF"/>
                 </a:solidFill>
@@ -9728,14 +9822,14 @@
       </p:sp>
       <p:sp>
         <p:nvSpPr>
-          <p:cNvPr id="31" name="TextBox 30"/>
-          <p:cNvSpPr txBox="1"/>
-          <p:nvPr/>
-        </p:nvSpPr>
-        <p:spPr>
-          <a:xfrm>
-            <a:off x="1527048" y="4864607"/>
-            <a:ext cx="4251959" cy="457200"/>
+          <p:cNvPr id="33" name="TextBox 32"/>
+          <p:cNvSpPr txBox="1"/>
+          <p:nvPr/>
+        </p:nvSpPr>
+        <p:spPr>
+          <a:xfrm>
+            <a:off x="1481328" y="5056631"/>
+            <a:ext cx="4297679" cy="457200"/>
           </a:xfrm>
           <a:prstGeom prst="rect">
             <a:avLst/>
@@ -9754,7 +9848,7 @@
               </a:lnSpc>
             </a:pPr>
             <a:r>
-              <a:rPr sz="1700" b="1">
+              <a:rPr sz="1650" b="1">
                 <a:solidFill>
                   <a:srgbClr val="0E2A56"/>
                 </a:solidFill>
@@ -9769,14 +9863,14 @@
       </p:sp>
       <p:sp>
         <p:nvSpPr>
-          <p:cNvPr id="32" name="TextBox 31"/>
-          <p:cNvSpPr txBox="1"/>
-          <p:nvPr/>
-        </p:nvSpPr>
-        <p:spPr>
-          <a:xfrm>
-            <a:off x="1527048" y="5266944"/>
-            <a:ext cx="4251959" cy="411480"/>
+          <p:cNvPr id="34" name="TextBox 33"/>
+          <p:cNvSpPr txBox="1"/>
+          <p:nvPr/>
+        </p:nvSpPr>
+        <p:spPr>
+          <a:xfrm>
+            <a:off x="1481328" y="5440679"/>
+            <a:ext cx="4297679" cy="365760"/>
           </a:xfrm>
           <a:prstGeom prst="rect">
             <a:avLst/>
@@ -9810,14 +9904,14 @@
       </p:sp>
       <p:sp>
         <p:nvSpPr>
-          <p:cNvPr id="33" name="Rounded Rectangle 32"/>
+          <p:cNvPr id="35" name="Rounded Rectangle 34"/>
           <p:cNvSpPr/>
           <p:nvPr/>
         </p:nvSpPr>
         <p:spPr>
           <a:xfrm>
-            <a:off x="6281928" y="4663440"/>
-            <a:ext cx="5349240" cy="1078992"/>
+            <a:off x="6281928" y="4892040"/>
+            <a:ext cx="5349240" cy="950976"/>
           </a:xfrm>
           <a:prstGeom prst="roundRect">
             <a:avLst>
@@ -9865,14 +9959,14 @@
       </p:sp>
       <p:sp>
         <p:nvSpPr>
-          <p:cNvPr id="34" name="Rounded Rectangle 33"/>
+          <p:cNvPr id="36" name="Rounded Rectangle 35"/>
           <p:cNvSpPr/>
           <p:nvPr/>
         </p:nvSpPr>
         <p:spPr>
           <a:xfrm>
-            <a:off x="6510528" y="4937759"/>
-            <a:ext cx="530352" cy="530352"/>
+            <a:off x="6510528" y="5111496"/>
+            <a:ext cx="512064" cy="512064"/>
           </a:xfrm>
           <a:prstGeom prst="roundRect">
             <a:avLst>
@@ -9911,14 +10005,14 @@
       </p:sp>
       <p:sp>
         <p:nvSpPr>
-          <p:cNvPr id="35" name="TextBox 34"/>
-          <p:cNvSpPr txBox="1"/>
-          <p:nvPr/>
-        </p:nvSpPr>
-        <p:spPr>
-          <a:xfrm>
-            <a:off x="6510528" y="4919472"/>
-            <a:ext cx="530352" cy="530352"/>
+          <p:cNvPr id="37" name="TextBox 36"/>
+          <p:cNvSpPr txBox="1"/>
+          <p:nvPr/>
+        </p:nvSpPr>
+        <p:spPr>
+          <a:xfrm>
+            <a:off x="6510528" y="5093207"/>
+            <a:ext cx="512064" cy="512064"/>
           </a:xfrm>
           <a:prstGeom prst="rect">
             <a:avLst/>
@@ -9937,7 +10031,7 @@
               </a:lnSpc>
             </a:pPr>
             <a:r>
-              <a:rPr sz="2000" b="1">
+              <a:rPr sz="1900" b="1">
                 <a:solidFill>
                   <a:srgbClr val="FFFFFF"/>
                 </a:solidFill>
@@ -9952,14 +10046,14 @@
       </p:sp>
       <p:sp>
         <p:nvSpPr>
-          <p:cNvPr id="36" name="TextBox 35"/>
-          <p:cNvSpPr txBox="1"/>
-          <p:nvPr/>
-        </p:nvSpPr>
-        <p:spPr>
-          <a:xfrm>
-            <a:off x="7242048" y="4864607"/>
-            <a:ext cx="4251959" cy="457200"/>
+          <p:cNvPr id="38" name="TextBox 37"/>
+          <p:cNvSpPr txBox="1"/>
+          <p:nvPr/>
+        </p:nvSpPr>
+        <p:spPr>
+          <a:xfrm>
+            <a:off x="7196328" y="5056631"/>
+            <a:ext cx="4297679" cy="457200"/>
           </a:xfrm>
           <a:prstGeom prst="rect">
             <a:avLst/>
@@ -9978,7 +10072,7 @@
               </a:lnSpc>
             </a:pPr>
             <a:r>
-              <a:rPr sz="1700" b="1">
+              <a:rPr sz="1650" b="1">
                 <a:solidFill>
                   <a:srgbClr val="0E2A56"/>
                 </a:solidFill>
@@ -9993,14 +10087,14 @@
       </p:sp>
       <p:sp>
         <p:nvSpPr>
-          <p:cNvPr id="37" name="TextBox 36"/>
-          <p:cNvSpPr txBox="1"/>
-          <p:nvPr/>
-        </p:nvSpPr>
-        <p:spPr>
-          <a:xfrm>
-            <a:off x="7242048" y="5266944"/>
-            <a:ext cx="4251959" cy="411480"/>
+          <p:cNvPr id="39" name="TextBox 38"/>
+          <p:cNvSpPr txBox="1"/>
+          <p:nvPr/>
+        </p:nvSpPr>
+        <p:spPr>
+          <a:xfrm>
+            <a:off x="7196328" y="5440679"/>
+            <a:ext cx="4297679" cy="365760"/>
           </a:xfrm>
           <a:prstGeom prst="rect">
             <a:avLst/>
@@ -10034,7 +10128,7 @@
       </p:sp>
       <p:sp>
         <p:nvSpPr>
-          <p:cNvPr id="38" name="TextBox 37"/>
+          <p:cNvPr id="40" name="TextBox 39"/>
           <p:cNvSpPr txBox="1"/>
           <p:nvPr/>
         </p:nvSpPr>
@@ -10075,7 +10169,7 @@
       </p:sp>
       <p:sp>
         <p:nvSpPr>
-          <p:cNvPr id="39" name="TextBox 38"/>
+          <p:cNvPr id="41" name="TextBox 40"/>
           <p:cNvSpPr txBox="1"/>
           <p:nvPr/>
         </p:nvSpPr>

--- a/slides/督导系统建设成果汇报.pptx
+++ b/slides/督导系统建设成果汇报.pptx
@@ -24054,7 +24054,7 @@
                 <a:ea typeface="Microsoft YaHei"/>
                 <a:cs typeface="Microsoft YaHei"/>
               </a:rPr>
-              <a:t>听课计划 · 待办与日历视图</a:t>
+              <a:t>听课计划 · 一键加入待办</a:t>
             </a:r>
           </a:p>
         </p:txBody>
@@ -24141,7 +24141,7 @@
                 <a:ea typeface="Microsoft YaHei"/>
                 <a:cs typeface="Microsoft YaHei"/>
               </a:rPr>
-              <a:t>把有意向的课程一键纳入计划，按周直观安排</a:t>
+              <a:t>在课程列表点“听课”即可加入计划，并可指定听课周次</a:t>
             </a:r>
           </a:p>
         </p:txBody>
@@ -24226,7 +24226,7 @@
                 <a:ea typeface="Microsoft YaHei"/>
                 <a:cs typeface="Microsoft YaHei"/>
               </a:rPr>
-              <a:t>一键将课程加入听课计划（类似待办清单）</a:t>
+              <a:t>在全校课程列表一键“听课”，加入听课计划（待办）</a:t>
             </a:r>
           </a:p>
         </p:txBody>
@@ -24311,7 +24311,7 @@
                 <a:ea typeface="Microsoft YaHei"/>
                 <a:cs typeface="Microsoft YaHei"/>
               </a:rPr>
-              <a:t>日历视图：以“节次 × 星期”网格展示当周安排</a:t>
+              <a:t>可指定计划听课周次（或“不指定周次”）</a:t>
             </a:r>
           </a:p>
         </p:txBody>
@@ -24396,7 +24396,7 @@
                 <a:ea typeface="Microsoft YaHei"/>
                 <a:cs typeface="Microsoft YaHei"/>
               </a:rPr>
-              <a:t>待听课 / 已评价 / 已取消 三种状态不同颜色区分</a:t>
+              <a:t>听课计划支持日历视图（节次 × 星期网格）按周查看</a:t>
             </a:r>
           </a:p>
         </p:txBody>
@@ -24481,7 +24481,7 @@
                 <a:ea typeface="Microsoft YaHei"/>
                 <a:cs typeface="Microsoft YaHei"/>
               </a:rPr>
-              <a:t>课前自动站内提醒，避免漏听</a:t>
+              <a:t>待听课 / 已评价 / 已取消 三状态区分，课前自动提醒</a:t>
             </a:r>
           </a:p>
         </p:txBody>
@@ -24494,24 +24494,30 @@
         </p:nvSpPr>
         <p:spPr>
           <a:xfrm>
-            <a:off x="5577840" y="2286000"/>
-            <a:ext cx="6035040" cy="3566160"/>
+            <a:off x="5760720" y="2240280"/>
+            <a:ext cx="5852160" cy="3657600"/>
           </a:xfrm>
           <a:prstGeom prst="roundRect">
             <a:avLst>
-              <a:gd name="adj" fmla="val 5000"/>
+              <a:gd name="adj" fmla="val 4000"/>
             </a:avLst>
           </a:prstGeom>
           <a:solidFill>
-            <a:srgbClr val="F6F9FF"/>
+            <a:srgbClr val="FFFFFF"/>
           </a:solidFill>
-          <a:ln w="20320">
+          <a:ln w="9525">
             <a:solidFill>
-              <a:srgbClr val="B9CBE6"/>
+              <a:srgbClr val="DCE6F4"/>
             </a:solidFill>
-            <a:prstDash val="dash"/>
           </a:ln>
           <a:effectLst/>
+          <a:effectLst>
+            <a:outerShdw blurRad="90000" dist="40000" dir="5400000" rotWithShape="0">
+              <a:srgbClr val="0E2A56">
+                <a:alpha val="16000"/>
+              </a:srgbClr>
+            </a:outerShdw>
+          </a:effectLst>
         </p:spPr>
         <p:style>
           <a:lnRef idx="1">
@@ -24535,16 +24541,40 @@
           </a:p>
         </p:txBody>
       </p:sp>
-      <p:sp>
-        <p:nvSpPr>
-          <p:cNvPr id="17" name="TextBox 16"/>
-          <p:cNvSpPr txBox="1"/>
-          <p:nvPr/>
-        </p:nvSpPr>
-        <p:spPr>
-          <a:xfrm>
-            <a:off x="5577840" y="3566160"/>
-            <a:ext cx="6035040" cy="457200"/>
+      <p:pic>
+        <p:nvPicPr>
+          <p:cNvPr id="17" name="Picture 16" descr="listenplan.png"/>
+          <p:cNvPicPr>
+            <a:picLocks noChangeAspect="1"/>
+          </p:cNvPicPr>
+          <p:nvPr/>
+        </p:nvPicPr>
+        <p:blipFill>
+          <a:blip r:embed="rId2"/>
+          <a:stretch>
+            <a:fillRect/>
+          </a:stretch>
+        </p:blipFill>
+        <p:spPr>
+          <a:xfrm>
+            <a:off x="6382159" y="2404872"/>
+            <a:ext cx="4609280" cy="3108960"/>
+          </a:xfrm>
+          <a:prstGeom prst="rect">
+            <a:avLst/>
+          </a:prstGeom>
+        </p:spPr>
+      </p:pic>
+      <p:sp>
+        <p:nvSpPr>
+          <p:cNvPr id="18" name="TextBox 17"/>
+          <p:cNvSpPr txBox="1"/>
+          <p:nvPr/>
+        </p:nvSpPr>
+        <p:spPr>
+          <a:xfrm>
+            <a:off x="5760720" y="5568696"/>
+            <a:ext cx="5852160" cy="274320"/>
           </a:xfrm>
           <a:prstGeom prst="rect">
             <a:avLst/>
@@ -24563,48 +24593,7 @@
               </a:lnSpc>
             </a:pPr>
             <a:r>
-              <a:rPr sz="3000" b="1">
-                <a:solidFill>
-                  <a:srgbClr val="B9CBE6"/>
-                </a:solidFill>
-                <a:latin typeface="Microsoft YaHei"/>
-                <a:ea typeface="Microsoft YaHei"/>
-                <a:cs typeface="Microsoft YaHei"/>
-              </a:rPr>
-              <a:t>［ 图 ］</a:t>
-            </a:r>
-          </a:p>
-        </p:txBody>
-      </p:sp>
-      <p:sp>
-        <p:nvSpPr>
-          <p:cNvPr id="18" name="TextBox 17"/>
-          <p:cNvSpPr txBox="1"/>
-          <p:nvPr/>
-        </p:nvSpPr>
-        <p:spPr>
-          <a:xfrm>
-            <a:off x="5577840" y="4069080"/>
-            <a:ext cx="6035040" cy="365760"/>
-          </a:xfrm>
-          <a:prstGeom prst="rect">
-            <a:avLst/>
-          </a:prstGeom>
-          <a:noFill/>
-        </p:spPr>
-        <p:txBody>
-          <a:bodyPr wrap="square" anchor="t" lIns="0" rIns="0" tIns="0" bIns="0">
-            <a:spAutoFit/>
-          </a:bodyPr>
-          <a:lstStyle/>
-          <a:p>
-            <a:pPr algn="ctr">
-              <a:lnSpc>
-                <a:spcPct val="100000"/>
-              </a:lnSpc>
-            </a:pPr>
-            <a:r>
-              <a:rPr sz="1700" b="1">
+              <a:rPr sz="1200" b="0">
                 <a:solidFill>
                   <a:srgbClr val="5C6B82"/>
                 </a:solidFill>
@@ -24612,7 +24601,7 @@
                 <a:ea typeface="Microsoft YaHei"/>
                 <a:cs typeface="Microsoft YaHei"/>
               </a:rPr>
-              <a:t>建议替换为真实截图</a:t>
+              <a:t>加入听课计划（真实界面）</a:t>
             </a:r>
           </a:p>
         </p:txBody>
@@ -24620,47 +24609,6 @@
       <p:sp>
         <p:nvSpPr>
           <p:cNvPr id="19" name="TextBox 18"/>
-          <p:cNvSpPr txBox="1"/>
-          <p:nvPr/>
-        </p:nvSpPr>
-        <p:spPr>
-          <a:xfrm>
-            <a:off x="5577840" y="4480560"/>
-            <a:ext cx="6035040" cy="365760"/>
-          </a:xfrm>
-          <a:prstGeom prst="rect">
-            <a:avLst/>
-          </a:prstGeom>
-          <a:noFill/>
-        </p:spPr>
-        <p:txBody>
-          <a:bodyPr wrap="square" anchor="t" lIns="0" rIns="0" tIns="0" bIns="0">
-            <a:spAutoFit/>
-          </a:bodyPr>
-          <a:lstStyle/>
-          <a:p>
-            <a:pPr algn="ctr">
-              <a:lnSpc>
-                <a:spcPct val="100000"/>
-              </a:lnSpc>
-            </a:pPr>
-            <a:r>
-              <a:rPr sz="1300" b="0">
-                <a:solidFill>
-                  <a:srgbClr val="7E93B5"/>
-                </a:solidFill>
-                <a:latin typeface="Microsoft YaHei"/>
-                <a:ea typeface="Microsoft YaHei"/>
-                <a:cs typeface="Microsoft YaHei"/>
-              </a:rPr>
-              <a:t>听课计划 · 日历视图</a:t>
-            </a:r>
-          </a:p>
-        </p:txBody>
-      </p:sp>
-      <p:sp>
-        <p:nvSpPr>
-          <p:cNvPr id="20" name="TextBox 19"/>
           <p:cNvSpPr txBox="1"/>
           <p:nvPr/>
         </p:nvSpPr>
@@ -24701,7 +24649,7 @@
       </p:sp>
       <p:sp>
         <p:nvSpPr>
-          <p:cNvPr id="21" name="TextBox 20"/>
+          <p:cNvPr id="20" name="TextBox 19"/>
           <p:cNvSpPr txBox="1"/>
           <p:nvPr/>
         </p:nvSpPr>
